--- a/midterm_presentation.pptx
+++ b/midterm_presentation.pptx
@@ -5,7 +5,7 @@
     <p:sldMasterId id="2147483661" r:id="rId1"/>
   </p:sldMasterIdLst>
   <p:notesMasterIdLst>
-    <p:notesMasterId r:id="rId9"/>
+    <p:notesMasterId r:id="rId8"/>
   </p:notesMasterIdLst>
   <p:sldIdLst>
     <p:sldId id="731" r:id="rId2"/>
@@ -14,7 +14,6 @@
     <p:sldId id="745" r:id="rId5"/>
     <p:sldId id="747" r:id="rId6"/>
     <p:sldId id="748" r:id="rId7"/>
-    <p:sldId id="743" r:id="rId8"/>
   </p:sldIdLst>
   <p:sldSz cx="12192000" cy="6858000"/>
   <p:notesSz cx="7099300" cy="10234613"/>
@@ -5734,7 +5733,7 @@
             </a:r>
             <a:r>
               <a:rPr lang="de-DE" dirty="0" err="1"/>
-              <a:t>region</a:t>
+              <a:t>country</a:t>
             </a:r>
             <a:endParaRPr lang="de-DE" dirty="0"/>
           </a:p>
@@ -6532,172 +6531,6 @@
 </p:sld>
 </file>
 
-<file path=ppt/slides/slide7.xml><?xml version="1.0" encoding="utf-8"?>
-<p:sld xmlns:a="http://schemas.openxmlformats.org/drawingml/2006/main" xmlns:r="http://schemas.openxmlformats.org/officeDocument/2006/relationships" xmlns:p="http://schemas.openxmlformats.org/presentationml/2006/main">
-  <p:cSld>
-    <p:spTree>
-      <p:nvGrpSpPr>
-        <p:cNvPr id="1" name="">
-          <a:extLst>
-            <a:ext uri="{FF2B5EF4-FFF2-40B4-BE49-F238E27FC236}">
-              <a16:creationId xmlns:a16="http://schemas.microsoft.com/office/drawing/2014/main" id="{A1DBED76-1CC3-6A19-D29C-A55D1DEA9AF8}"/>
-            </a:ext>
-          </a:extLst>
-        </p:cNvPr>
-        <p:cNvGrpSpPr/>
-        <p:nvPr/>
-      </p:nvGrpSpPr>
-      <p:grpSpPr>
-        <a:xfrm>
-          <a:off x="0" y="0"/>
-          <a:ext cx="0" cy="0"/>
-          <a:chOff x="0" y="0"/>
-          <a:chExt cx="0" cy="0"/>
-        </a:xfrm>
-      </p:grpSpPr>
-      <p:sp>
-        <p:nvSpPr>
-          <p:cNvPr id="2" name="Titel 1">
-            <a:extLst>
-              <a:ext uri="{FF2B5EF4-FFF2-40B4-BE49-F238E27FC236}">
-                <a16:creationId xmlns:a16="http://schemas.microsoft.com/office/drawing/2014/main" id="{A9605524-0F3E-0560-60A4-A3DF616C8FBC}"/>
-              </a:ext>
-            </a:extLst>
-          </p:cNvPr>
-          <p:cNvSpPr>
-            <a:spLocks noGrp="1"/>
-          </p:cNvSpPr>
-          <p:nvPr>
-            <p:ph type="title"/>
-          </p:nvPr>
-        </p:nvSpPr>
-        <p:spPr/>
-        <p:txBody>
-          <a:bodyPr/>
-          <a:lstStyle/>
-          <a:p>
-            <a:r>
-              <a:rPr lang="de-DE" dirty="0"/>
-              <a:t>Tennis</a:t>
-            </a:r>
-          </a:p>
-        </p:txBody>
-      </p:sp>
-      <p:sp>
-        <p:nvSpPr>
-          <p:cNvPr id="4" name="Rectangle 1">
-            <a:extLst>
-              <a:ext uri="{FF2B5EF4-FFF2-40B4-BE49-F238E27FC236}">
-                <a16:creationId xmlns:a16="http://schemas.microsoft.com/office/drawing/2014/main" id="{CF442C95-D115-AC9C-4370-154C90DBE27A}"/>
-              </a:ext>
-            </a:extLst>
-          </p:cNvPr>
-          <p:cNvSpPr>
-            <a:spLocks noGrp="1" noChangeArrowheads="1"/>
-          </p:cNvSpPr>
-          <p:nvPr>
-            <p:ph idx="1"/>
-          </p:nvPr>
-        </p:nvSpPr>
-        <p:spPr bwMode="auto">
-          <a:xfrm>
-            <a:off x="958851" y="1725969"/>
-            <a:ext cx="7540847" cy="1287532"/>
-          </a:xfrm>
-          <a:prstGeom prst="rect">
-            <a:avLst/>
-          </a:prstGeom>
-          <a:noFill/>
-          <a:ln>
-            <a:noFill/>
-          </a:ln>
-          <a:effectLst/>
-          <a:extLst>
-            <a:ext uri="{909E8E84-426E-40DD-AFC4-6F175D3DCCD1}">
-              <a14:hiddenFill xmlns:a14="http://schemas.microsoft.com/office/drawing/2010/main">
-                <a:solidFill>
-                  <a:schemeClr val="accent1"/>
-                </a:solidFill>
-              </a14:hiddenFill>
-            </a:ext>
-            <a:ext uri="{91240B29-F687-4F45-9708-019B960494DF}">
-              <a14:hiddenLine xmlns:a14="http://schemas.microsoft.com/office/drawing/2010/main" w="9525">
-                <a:solidFill>
-                  <a:schemeClr val="tx1"/>
-                </a:solidFill>
-                <a:miter lim="800000"/>
-                <a:headEnd/>
-                <a:tailEnd/>
-              </a14:hiddenLine>
-            </a:ext>
-            <a:ext uri="{AF507438-7753-43E0-B8FC-AC1667EBCBE1}">
-              <a14:hiddenEffects xmlns:a14="http://schemas.microsoft.com/office/drawing/2010/main">
-                <a:effectLst>
-                  <a:outerShdw dist="35921" dir="2700000" algn="ctr" rotWithShape="0">
-                    <a:schemeClr val="bg2"/>
-                  </a:outerShdw>
-                </a:effectLst>
-              </a14:hiddenEffects>
-            </a:ext>
-          </a:extLst>
-        </p:spPr>
-        <p:txBody>
-          <a:bodyPr vert="horz" wrap="none" lIns="91440" tIns="45720" rIns="91440" bIns="45720" numCol="1" anchor="ctr" anchorCtr="0" compatLnSpc="1">
-            <a:prstTxWarp prst="textNoShape">
-              <a:avLst/>
-            </a:prstTxWarp>
-            <a:spAutoFit/>
-          </a:bodyPr>
-          <a:lstStyle/>
-          <a:p>
-            <a:pPr marL="0" indent="0">
-              <a:lnSpc>
-                <a:spcPct val="150000"/>
-              </a:lnSpc>
-              <a:buNone/>
-            </a:pPr>
-            <a:r>
-              <a:rPr lang="en-US" sz="1800" b="1" dirty="0"/>
-              <a:t>Questions</a:t>
-            </a:r>
-          </a:p>
-          <a:p>
-            <a:pPr>
-              <a:lnSpc>
-                <a:spcPct val="150000"/>
-              </a:lnSpc>
-            </a:pPr>
-            <a:r>
-              <a:rPr lang="en-US" sz="1800" dirty="0"/>
-              <a:t>“Are left-handed players more successful on specific surfaces?”</a:t>
-            </a:r>
-          </a:p>
-          <a:p>
-            <a:pPr>
-              <a:lnSpc>
-                <a:spcPct val="150000"/>
-              </a:lnSpc>
-            </a:pPr>
-            <a:r>
-              <a:rPr lang="en-US" sz="1800" dirty="0"/>
-              <a:t>“Do players serve faster in important points (e.g. break or set points)?”</a:t>
-            </a:r>
-          </a:p>
-        </p:txBody>
-      </p:sp>
-    </p:spTree>
-    <p:extLst>
-      <p:ext uri="{BB962C8B-B14F-4D97-AF65-F5344CB8AC3E}">
-        <p14:creationId xmlns:p14="http://schemas.microsoft.com/office/powerpoint/2010/main" val="652755199"/>
-      </p:ext>
-    </p:extLst>
-  </p:cSld>
-  <p:clrMapOvr>
-    <a:masterClrMapping/>
-  </p:clrMapOvr>
-</p:sld>
-</file>
-
 <file path=ppt/theme/theme1.xml><?xml version="1.0" encoding="utf-8"?>
 <a:theme xmlns:a="http://schemas.openxmlformats.org/drawingml/2006/main" name="UT_pptmaster_gen_en">
   <a:themeElements>

--- a/midterm_presentation.pptx
+++ b/midterm_presentation.pptx
@@ -5,7 +5,7 @@
     <p:sldMasterId id="2147483661" r:id="rId1"/>
   </p:sldMasterIdLst>
   <p:notesMasterIdLst>
-    <p:notesMasterId r:id="rId8"/>
+    <p:notesMasterId r:id="rId11"/>
   </p:notesMasterIdLst>
   <p:sldIdLst>
     <p:sldId id="731" r:id="rId2"/>
@@ -14,6 +14,9 @@
     <p:sldId id="745" r:id="rId5"/>
     <p:sldId id="747" r:id="rId6"/>
     <p:sldId id="748" r:id="rId7"/>
+    <p:sldId id="749" r:id="rId8"/>
+    <p:sldId id="750" r:id="rId9"/>
+    <p:sldId id="751" r:id="rId10"/>
   </p:sldIdLst>
   <p:sldSz cx="12192000" cy="6858000"/>
   <p:notesSz cx="7099300" cy="10234613"/>
@@ -4386,8 +4389,8 @@
           </a:p>
         </p:txBody>
       </p:sp>
-      <mc:AlternateContent xmlns:mc="http://schemas.openxmlformats.org/markup-compatibility/2006">
-        <mc:Choice xmlns:a14="http://schemas.microsoft.com/office/drawing/2010/main" Requires="a14">
+      <mc:AlternateContent xmlns:mc="http://schemas.openxmlformats.org/markup-compatibility/2006" xmlns:a14="http://schemas.microsoft.com/office/drawing/2010/main">
+        <mc:Choice Requires="a14">
           <p:sp>
             <p:nvSpPr>
               <p:cNvPr id="4" name="Rectangle 1">
@@ -4741,7 +4744,7 @@
                     <m:d>
                       <m:dPr>
                         <m:ctrlPr>
-                          <a:rPr lang="de-DE" sz="1800" b="0" i="0" smtClean="0">
+                          <a:rPr lang="de-DE" sz="1800" b="0" i="1" smtClean="0">
                             <a:latin typeface="Cambria Math" panose="02040503050406030204" pitchFamily="18" charset="0"/>
                           </a:rPr>
                         </m:ctrlPr>
@@ -4884,13 +4887,7 @@
                       <a:rPr lang="de-DE" sz="1800" b="0" i="0" smtClean="0">
                         <a:latin typeface="Cambria Math" panose="02040503050406030204" pitchFamily="18" charset="0"/>
                       </a:rPr>
-                      <m:t>𝑤𝑖𝑡</m:t>
-                    </m:r>
-                    <m:r>
-                      <a:rPr lang="de-DE" sz="1800" b="0" i="0" smtClean="0">
-                        <a:latin typeface="Cambria Math" panose="02040503050406030204" pitchFamily="18" charset="0"/>
-                      </a:rPr>
-                      <m:t>h</m:t>
+                      <m:t>𝑤𝑖𝑡h</m:t>
                     </m:r>
                     <m:r>
                       <a:rPr lang="de-DE" sz="1800" b="0" i="0" smtClean="0">
@@ -5090,7 +5087,7 @@
             </p:txBody>
           </p:sp>
         </mc:Choice>
-        <mc:Fallback>
+        <mc:Fallback xmlns="">
           <p:sp>
             <p:nvSpPr>
               <p:cNvPr id="4" name="Rectangle 1">
@@ -5258,8 +5255,8 @@
           </a:p>
         </p:txBody>
       </p:sp>
-      <mc:AlternateContent xmlns:mc="http://schemas.openxmlformats.org/markup-compatibility/2006">
-        <mc:Choice xmlns:a14="http://schemas.microsoft.com/office/drawing/2010/main" Requires="a14">
+      <mc:AlternateContent xmlns:mc="http://schemas.openxmlformats.org/markup-compatibility/2006" xmlns:a14="http://schemas.microsoft.com/office/drawing/2010/main">
+        <mc:Choice Requires="a14">
           <p:sp>
             <p:nvSpPr>
               <p:cNvPr id="4" name="Rectangle 1">
@@ -5401,32 +5398,42 @@
                 <a14:m>
                   <m:oMath xmlns:m="http://schemas.openxmlformats.org/officeDocument/2006/math">
                     <m:r>
-                      <a:rPr lang="de-DE" i="1"/>
+                      <a:rPr lang="de-DE" i="1">
+                        <a:latin typeface="Cambria Math" panose="02040503050406030204" pitchFamily="18" charset="0"/>
+                      </a:rPr>
                       <m:t>𝑝</m:t>
                     </m:r>
                     <m:d>
                       <m:dPr>
                         <m:sepChr m:val=","/>
                         <m:ctrlPr>
-                          <a:rPr lang="ar-AE" i="1"/>
+                          <a:rPr lang="ar-AE" i="1">
+                            <a:latin typeface="Cambria Math" panose="02040503050406030204" pitchFamily="18" charset="0"/>
+                          </a:rPr>
                         </m:ctrlPr>
                       </m:dPr>
                       <m:e>
                         <m:sSub>
                           <m:sSubPr>
                             <m:ctrlPr>
-                              <a:rPr lang="ar-AE" i="1"/>
+                              <a:rPr lang="ar-AE" i="1">
+                                <a:latin typeface="Cambria Math" panose="02040503050406030204" pitchFamily="18" charset="0"/>
+                              </a:rPr>
                             </m:ctrlPr>
                           </m:sSubPr>
                           <m:e>
                             <m:r>
-                              <a:rPr lang="ar-AE" i="1"/>
+                              <a:rPr lang="ar-AE" i="1">
+                                <a:latin typeface="Cambria Math" panose="02040503050406030204" pitchFamily="18" charset="0"/>
+                              </a:rPr>
                               <m:t>𝜇</m:t>
                             </m:r>
                           </m:e>
                           <m:sub>
                             <m:r>
-                              <a:rPr lang="ar-AE" i="1"/>
+                              <a:rPr lang="ar-AE" i="1">
+                                <a:latin typeface="Cambria Math" panose="02040503050406030204" pitchFamily="18" charset="0"/>
+                              </a:rPr>
                               <m:t>𝑐</m:t>
                             </m:r>
                           </m:sub>
@@ -5436,18 +5443,24 @@
                         <m:sSub>
                           <m:sSubPr>
                             <m:ctrlPr>
-                              <a:rPr lang="ar-AE" i="1"/>
+                              <a:rPr lang="ar-AE" i="1">
+                                <a:latin typeface="Cambria Math" panose="02040503050406030204" pitchFamily="18" charset="0"/>
+                              </a:rPr>
                             </m:ctrlPr>
                           </m:sSubPr>
                           <m:e>
                             <m:r>
-                              <a:rPr lang="ar-AE" i="1"/>
+                              <a:rPr lang="ar-AE" i="1">
+                                <a:latin typeface="Cambria Math" panose="02040503050406030204" pitchFamily="18" charset="0"/>
+                              </a:rPr>
                               <m:t>𝜎</m:t>
                             </m:r>
                           </m:e>
                           <m:sub>
                             <m:r>
-                              <a:rPr lang="ar-AE" i="1"/>
+                              <a:rPr lang="ar-AE" i="1">
+                                <a:latin typeface="Cambria Math" panose="02040503050406030204" pitchFamily="18" charset="0"/>
+                              </a:rPr>
                               <m:t>𝑐</m:t>
                             </m:r>
                           </m:sub>
@@ -5457,18 +5470,24 @@
                         <m:sSub>
                           <m:sSubPr>
                             <m:ctrlPr>
-                              <a:rPr lang="ar-AE" i="1"/>
+                              <a:rPr lang="ar-AE" i="1">
+                                <a:latin typeface="Cambria Math" panose="02040503050406030204" pitchFamily="18" charset="0"/>
+                              </a:rPr>
                             </m:ctrlPr>
                           </m:sSubPr>
                           <m:e>
                             <m:r>
-                              <a:rPr lang="ar-AE" i="1"/>
+                              <a:rPr lang="ar-AE" i="1">
+                                <a:latin typeface="Cambria Math" panose="02040503050406030204" pitchFamily="18" charset="0"/>
+                              </a:rPr>
                               <m:t>𝜂</m:t>
                             </m:r>
                           </m:e>
                           <m:sub>
                             <m:r>
-                              <a:rPr lang="ar-AE" i="1"/>
+                              <a:rPr lang="ar-AE" i="1">
+                                <a:latin typeface="Cambria Math" panose="02040503050406030204" pitchFamily="18" charset="0"/>
+                              </a:rPr>
                               <m:t>𝑟</m:t>
                             </m:r>
                           </m:sub>
@@ -5476,24 +5495,32 @@
                       </m:e>
                       <m:e>
                         <m:r>
-                          <a:rPr lang="ar-AE"/>
+                          <a:rPr lang="ar-AE">
+                            <a:latin typeface="Cambria Math" panose="02040503050406030204" pitchFamily="18" charset="0"/>
+                          </a:rPr>
                           <m:t>∣</m:t>
                         </m:r>
                         <m:sSub>
                           <m:sSubPr>
                             <m:ctrlPr>
-                              <a:rPr lang="ar-AE" i="1"/>
+                              <a:rPr lang="ar-AE" i="1">
+                                <a:latin typeface="Cambria Math" panose="02040503050406030204" pitchFamily="18" charset="0"/>
+                              </a:rPr>
                             </m:ctrlPr>
                           </m:sSubPr>
                           <m:e>
                             <m:r>
-                              <a:rPr lang="ar-AE" i="1"/>
+                              <a:rPr lang="ar-AE" i="1">
+                                <a:latin typeface="Cambria Math" panose="02040503050406030204" pitchFamily="18" charset="0"/>
+                              </a:rPr>
                               <m:t>𝑦</m:t>
                             </m:r>
                           </m:e>
                           <m:sub>
                             <m:r>
-                              <a:rPr lang="ar-AE" i="1"/>
+                              <a:rPr lang="ar-AE" i="1">
+                                <a:latin typeface="Cambria Math" panose="02040503050406030204" pitchFamily="18" charset="0"/>
+                              </a:rPr>
                               <m:t>𝑟</m:t>
                             </m:r>
                           </m:sub>
@@ -5501,18 +5528,24 @@
                         <m:sSub>
                           <m:sSubPr>
                             <m:ctrlPr>
-                              <a:rPr lang="ar-AE" i="1"/>
+                              <a:rPr lang="ar-AE" i="1">
+                                <a:latin typeface="Cambria Math" panose="02040503050406030204" pitchFamily="18" charset="0"/>
+                              </a:rPr>
                             </m:ctrlPr>
                           </m:sSubPr>
                           <m:e>
                             <m:r>
-                              <a:rPr lang="ar-AE" i="1"/>
+                              <a:rPr lang="ar-AE" i="1">
+                                <a:latin typeface="Cambria Math" panose="02040503050406030204" pitchFamily="18" charset="0"/>
+                              </a:rPr>
                               <m:t>𝑁</m:t>
                             </m:r>
                           </m:e>
                           <m:sub>
                             <m:r>
-                              <a:rPr lang="ar-AE" i="1"/>
+                              <a:rPr lang="ar-AE" i="1">
+                                <a:latin typeface="Cambria Math" panose="02040503050406030204" pitchFamily="18" charset="0"/>
+                              </a:rPr>
                               <m:t>𝑟</m:t>
                             </m:r>
                           </m:sub>
@@ -5535,7 +5568,7 @@
             </p:txBody>
           </p:sp>
         </mc:Choice>
-        <mc:Fallback>
+        <mc:Fallback xmlns="">
           <p:sp>
             <p:nvSpPr>
               <p:cNvPr id="4" name="Rectangle 1">
@@ -5739,8 +5772,8 @@
           </a:p>
         </p:txBody>
       </p:sp>
-      <mc:AlternateContent xmlns:mc="http://schemas.openxmlformats.org/markup-compatibility/2006">
-        <mc:Choice xmlns:a14="http://schemas.microsoft.com/office/drawing/2010/main" Requires="a14">
+      <mc:AlternateContent xmlns:mc="http://schemas.openxmlformats.org/markup-compatibility/2006" xmlns:a14="http://schemas.microsoft.com/office/drawing/2010/main">
+        <mc:Choice Requires="a14">
           <p:sp>
             <p:nvSpPr>
               <p:cNvPr id="4" name="Rectangle 1">
@@ -5832,23 +5865,21 @@
                 <a14:m>
                   <m:oMath xmlns:m="http://schemas.openxmlformats.org/officeDocument/2006/math">
                     <m:r>
-                      <a:rPr lang="en-US" sz="1800" i="1"/>
+                      <a:rPr lang="en-US" sz="1800" i="1">
+                        <a:latin typeface="Cambria Math" panose="02040503050406030204" pitchFamily="18" charset="0"/>
+                      </a:rPr>
                       <m:t>𝑠</m:t>
                     </m:r>
                     <m:r>
-                      <a:rPr lang="en-US" sz="1800"/>
-                      <m:t>=</m:t>
+                      <a:rPr lang="en-US" sz="1800">
+                        <a:latin typeface="Cambria Math" panose="02040503050406030204" pitchFamily="18" charset="0"/>
+                      </a:rPr>
+                      <m:t>=1…</m:t>
                     </m:r>
                     <m:r>
-                      <a:rPr lang="en-US" sz="1800"/>
-                      <m:t>1</m:t>
-                    </m:r>
-                    <m:r>
-                      <a:rPr lang="en-US" sz="1800"/>
-                      <m:t>…</m:t>
-                    </m:r>
-                    <m:r>
-                      <a:rPr lang="en-US" sz="1800" i="1"/>
+                      <a:rPr lang="en-US" sz="1800" i="1">
+                        <a:latin typeface="Cambria Math" panose="02040503050406030204" pitchFamily="18" charset="0"/>
+                      </a:rPr>
                       <m:t>𝑆</m:t>
                     </m:r>
                   </m:oMath>
@@ -5905,7 +5936,19 @@
                       <a:rPr lang="pt-BR" sz="1600" i="1" dirty="0" smtClean="0">
                         <a:latin typeface="Cambria Math" panose="02040503050406030204" pitchFamily="18" charset="0"/>
                       </a:rPr>
-                      <m:t>)​=</m:t>
+                      <m:t>)</m:t>
+                    </m:r>
+                    <m:r>
+                      <a:rPr lang="pt-BR" sz="1600" i="1" dirty="0" smtClean="0">
+                        <a:latin typeface="Cambria Math" panose="02040503050406030204" pitchFamily="18" charset="0"/>
+                      </a:rPr>
+                      <m:t>​</m:t>
+                    </m:r>
+                    <m:r>
+                      <a:rPr lang="pt-BR" sz="1600" i="1" dirty="0" smtClean="0">
+                        <a:latin typeface="Cambria Math" panose="02040503050406030204" pitchFamily="18" charset="0"/>
+                      </a:rPr>
+                      <m:t>=</m:t>
                     </m:r>
                     <m:r>
                       <m:rPr>
@@ -5968,7 +6011,13 @@
                       <a:rPr lang="pt-BR" sz="1600" i="1" dirty="0" smtClean="0">
                         <a:latin typeface="Cambria Math" panose="02040503050406030204" pitchFamily="18" charset="0"/>
                       </a:rPr>
-                      <m:t>​+</m:t>
+                      <m:t>​</m:t>
+                    </m:r>
+                    <m:r>
+                      <a:rPr lang="pt-BR" sz="1600" i="1" dirty="0" smtClean="0">
+                        <a:latin typeface="Cambria Math" panose="02040503050406030204" pitchFamily="18" charset="0"/>
+                      </a:rPr>
+                      <m:t>+</m:t>
                     </m:r>
                     <m:sSub>
                       <m:sSubPr>
@@ -6059,7 +6108,19 @@
                       <a:rPr lang="pt-BR" sz="1600" i="1" dirty="0" smtClean="0">
                         <a:latin typeface="Cambria Math" panose="02040503050406030204" pitchFamily="18" charset="0"/>
                       </a:rPr>
-                      <m:t>)​)</m:t>
+                      <m:t>)</m:t>
+                    </m:r>
+                    <m:r>
+                      <a:rPr lang="pt-BR" sz="1600" i="1" dirty="0" smtClean="0">
+                        <a:latin typeface="Cambria Math" panose="02040503050406030204" pitchFamily="18" charset="0"/>
+                      </a:rPr>
+                      <m:t>​</m:t>
+                    </m:r>
+                    <m:r>
+                      <a:rPr lang="pt-BR" sz="1600" i="1" dirty="0" smtClean="0">
+                        <a:latin typeface="Cambria Math" panose="02040503050406030204" pitchFamily="18" charset="0"/>
+                      </a:rPr>
+                      <m:t>)</m:t>
                     </m:r>
                   </m:oMath>
                 </a14:m>
@@ -6403,7 +6464,7 @@
             </p:txBody>
           </p:sp>
         </mc:Choice>
-        <mc:Fallback>
+        <mc:Fallback xmlns="">
           <p:sp>
             <p:nvSpPr>
               <p:cNvPr id="4" name="Rectangle 1">
@@ -6522,6 +6583,755 @@
     <p:extLst>
       <p:ext uri="{BB962C8B-B14F-4D97-AF65-F5344CB8AC3E}">
         <p14:creationId xmlns:p14="http://schemas.microsoft.com/office/powerpoint/2010/main" val="2902252723"/>
+      </p:ext>
+    </p:extLst>
+  </p:cSld>
+  <p:clrMapOvr>
+    <a:masterClrMapping/>
+  </p:clrMapOvr>
+</p:sld>
+</file>
+
+<file path=ppt/slides/slide7.xml><?xml version="1.0" encoding="utf-8"?>
+<p:sld xmlns:a="http://schemas.openxmlformats.org/drawingml/2006/main" xmlns:r="http://schemas.openxmlformats.org/officeDocument/2006/relationships" xmlns:p="http://schemas.openxmlformats.org/presentationml/2006/main">
+  <p:cSld>
+    <p:spTree>
+      <p:nvGrpSpPr>
+        <p:cNvPr id="1" name=""/>
+        <p:cNvGrpSpPr/>
+        <p:nvPr/>
+      </p:nvGrpSpPr>
+      <p:grpSpPr>
+        <a:xfrm>
+          <a:off x="0" y="0"/>
+          <a:ext cx="0" cy="0"/>
+          <a:chOff x="0" y="0"/>
+          <a:chExt cx="0" cy="0"/>
+        </a:xfrm>
+      </p:grpSpPr>
+      <p:sp>
+        <p:nvSpPr>
+          <p:cNvPr id="9" name="Title 1">
+            <a:extLst>
+              <a:ext uri="{FF2B5EF4-FFF2-40B4-BE49-F238E27FC236}">
+                <a16:creationId xmlns:a16="http://schemas.microsoft.com/office/drawing/2014/main" id="{1F21874D-921E-AE0E-1735-63C7F75B5F3B}"/>
+              </a:ext>
+            </a:extLst>
+          </p:cNvPr>
+          <p:cNvSpPr>
+            <a:spLocks noGrp="1"/>
+          </p:cNvSpPr>
+          <p:nvPr>
+            <p:ph type="title"/>
+          </p:nvPr>
+        </p:nvSpPr>
+        <p:spPr>
+          <a:xfrm>
+            <a:off x="958852" y="286137"/>
+            <a:ext cx="9159314" cy="400110"/>
+          </a:xfrm>
+        </p:spPr>
+        <p:txBody>
+          <a:bodyPr/>
+          <a:lstStyle/>
+          <a:p>
+            <a:r>
+              <a:rPr lang="en-US" dirty="0"/>
+              <a:t>When do the most accidents happen?</a:t>
+            </a:r>
+          </a:p>
+        </p:txBody>
+      </p:sp>
+      <p:sp>
+        <p:nvSpPr>
+          <p:cNvPr id="11" name="Content Placeholder 2">
+            <a:extLst>
+              <a:ext uri="{FF2B5EF4-FFF2-40B4-BE49-F238E27FC236}">
+                <a16:creationId xmlns:a16="http://schemas.microsoft.com/office/drawing/2014/main" id="{E85CDEED-C1EE-765C-9CDA-845F6AA66A2C}"/>
+              </a:ext>
+            </a:extLst>
+          </p:cNvPr>
+          <p:cNvSpPr>
+            <a:spLocks noGrp="1"/>
+          </p:cNvSpPr>
+          <p:nvPr>
+            <p:ph sz="half" idx="1"/>
+          </p:nvPr>
+        </p:nvSpPr>
+        <p:spPr>
+          <a:xfrm>
+            <a:off x="958851" y="1079947"/>
+            <a:ext cx="5035549" cy="5233766"/>
+          </a:xfrm>
+        </p:spPr>
+        <p:txBody>
+          <a:bodyPr/>
+          <a:lstStyle/>
+          <a:p>
+            <a:r>
+              <a:rPr lang="en-US" dirty="0"/>
+              <a:t>Shows percentage of all accidents happening on a specific time.</a:t>
+            </a:r>
+          </a:p>
+          <a:p>
+            <a:endParaRPr lang="en-US" dirty="0"/>
+          </a:p>
+          <a:p>
+            <a:r>
+              <a:rPr lang="en-US" dirty="0"/>
+              <a:t>One plot for only weekdays. It can be extended to months, or weekend days…</a:t>
+            </a:r>
+          </a:p>
+          <a:p>
+            <a:endParaRPr lang="en-US" dirty="0"/>
+          </a:p>
+          <a:p>
+            <a:r>
+              <a:rPr lang="en-US" dirty="0"/>
+              <a:t>Idea: Find specific motorbike time slots and compare the output after erasing some motorbike peaks</a:t>
+            </a:r>
+          </a:p>
+        </p:txBody>
+      </p:sp>
+      <p:pic>
+        <p:nvPicPr>
+          <p:cNvPr id="4" name="Inhaltsplatzhalter 3">
+            <a:extLst>
+              <a:ext uri="{FF2B5EF4-FFF2-40B4-BE49-F238E27FC236}">
+                <a16:creationId xmlns:a16="http://schemas.microsoft.com/office/drawing/2014/main" id="{B1324270-0DC2-539F-ABB5-4E9F83739F42}"/>
+              </a:ext>
+            </a:extLst>
+          </p:cNvPr>
+          <p:cNvPicPr>
+            <a:picLocks noGrp="1" noChangeAspect="1"/>
+          </p:cNvPicPr>
+          <p:nvPr>
+            <p:ph sz="half" idx="2"/>
+          </p:nvPr>
+        </p:nvPicPr>
+        <p:blipFill>
+          <a:blip r:embed="rId2"/>
+          <a:stretch>
+            <a:fillRect/>
+          </a:stretch>
+        </p:blipFill>
+        <p:spPr>
+          <a:xfrm>
+            <a:off x="6203169" y="1079946"/>
+            <a:ext cx="5024414" cy="5233767"/>
+          </a:xfrm>
+          <a:prstGeom prst="rect">
+            <a:avLst/>
+          </a:prstGeom>
+          <a:noFill/>
+        </p:spPr>
+      </p:pic>
+      <p:sp>
+        <p:nvSpPr>
+          <p:cNvPr id="13" name="Slide Number Placeholder 4">
+            <a:extLst>
+              <a:ext uri="{FF2B5EF4-FFF2-40B4-BE49-F238E27FC236}">
+                <a16:creationId xmlns:a16="http://schemas.microsoft.com/office/drawing/2014/main" id="{6821466B-DEC5-37D0-61B9-A3D32D533C6B}"/>
+              </a:ext>
+            </a:extLst>
+          </p:cNvPr>
+          <p:cNvSpPr>
+            <a:spLocks noGrp="1"/>
+          </p:cNvSpPr>
+          <p:nvPr>
+            <p:ph type="sldNum" sz="quarter" idx="10"/>
+          </p:nvPr>
+        </p:nvSpPr>
+        <p:spPr>
+          <a:xfrm>
+            <a:off x="10702587" y="6519863"/>
+            <a:ext cx="530446" cy="184666"/>
+          </a:xfrm>
+        </p:spPr>
+        <p:txBody>
+          <a:bodyPr/>
+          <a:lstStyle/>
+          <a:p>
+            <a:pPr>
+              <a:spcAft>
+                <a:spcPts val="600"/>
+              </a:spcAft>
+            </a:pPr>
+            <a:fld id="{109D0305-AB8D-4D9F-955E-175B8BE15BA1}" type="slidenum">
+              <a:rPr lang="en-US" smtClean="0"/>
+              <a:pPr>
+                <a:spcAft>
+                  <a:spcPts val="600"/>
+                </a:spcAft>
+              </a:pPr>
+              <a:t>7</a:t>
+            </a:fld>
+            <a:endParaRPr lang="en-US"/>
+          </a:p>
+        </p:txBody>
+      </p:sp>
+      <p:sp>
+        <p:nvSpPr>
+          <p:cNvPr id="15" name="Footer Placeholder 5">
+            <a:extLst>
+              <a:ext uri="{FF2B5EF4-FFF2-40B4-BE49-F238E27FC236}">
+                <a16:creationId xmlns:a16="http://schemas.microsoft.com/office/drawing/2014/main" id="{1F30F4FA-78D9-51E7-2E1D-DB748849054B}"/>
+              </a:ext>
+            </a:extLst>
+          </p:cNvPr>
+          <p:cNvSpPr>
+            <a:spLocks noGrp="1"/>
+          </p:cNvSpPr>
+          <p:nvPr>
+            <p:ph type="ftr" sz="quarter" idx="11"/>
+          </p:nvPr>
+        </p:nvSpPr>
+        <p:spPr>
+          <a:xfrm>
+            <a:off x="849991" y="6519864"/>
+            <a:ext cx="9774465" cy="184665"/>
+          </a:xfrm>
+        </p:spPr>
+        <p:txBody>
+          <a:bodyPr/>
+          <a:lstStyle/>
+          <a:p>
+            <a:pPr>
+              <a:spcAft>
+                <a:spcPts val="600"/>
+              </a:spcAft>
+            </a:pPr>
+            <a:r>
+              <a:rPr lang="en-US" sz="1200"/>
+              <a:t>Hands-on AI based 3D Vision - Summer 25</a:t>
+            </a:r>
+          </a:p>
+        </p:txBody>
+      </p:sp>
+    </p:spTree>
+    <p:extLst>
+      <p:ext uri="{BB962C8B-B14F-4D97-AF65-F5344CB8AC3E}">
+        <p14:creationId xmlns:p14="http://schemas.microsoft.com/office/powerpoint/2010/main" val="3287023341"/>
+      </p:ext>
+    </p:extLst>
+  </p:cSld>
+  <p:clrMapOvr>
+    <a:masterClrMapping/>
+  </p:clrMapOvr>
+</p:sld>
+</file>
+
+<file path=ppt/slides/slide8.xml><?xml version="1.0" encoding="utf-8"?>
+<p:sld xmlns:a="http://schemas.openxmlformats.org/drawingml/2006/main" xmlns:r="http://schemas.openxmlformats.org/officeDocument/2006/relationships" xmlns:p="http://schemas.openxmlformats.org/presentationml/2006/main">
+  <p:cSld>
+    <p:spTree>
+      <p:nvGrpSpPr>
+        <p:cNvPr id="1" name=""/>
+        <p:cNvGrpSpPr/>
+        <p:nvPr/>
+      </p:nvGrpSpPr>
+      <p:grpSpPr>
+        <a:xfrm>
+          <a:off x="0" y="0"/>
+          <a:ext cx="0" cy="0"/>
+          <a:chOff x="0" y="0"/>
+          <a:chExt cx="0" cy="0"/>
+        </a:xfrm>
+      </p:grpSpPr>
+      <p:sp>
+        <p:nvSpPr>
+          <p:cNvPr id="2" name="Titel 1">
+            <a:extLst>
+              <a:ext uri="{FF2B5EF4-FFF2-40B4-BE49-F238E27FC236}">
+                <a16:creationId xmlns:a16="http://schemas.microsoft.com/office/drawing/2014/main" id="{09D5B216-0A19-2690-D623-B72B4389767E}"/>
+              </a:ext>
+            </a:extLst>
+          </p:cNvPr>
+          <p:cNvSpPr>
+            <a:spLocks noGrp="1"/>
+          </p:cNvSpPr>
+          <p:nvPr>
+            <p:ph type="title"/>
+          </p:nvPr>
+        </p:nvSpPr>
+        <p:spPr/>
+        <p:txBody>
+          <a:bodyPr/>
+          <a:lstStyle/>
+          <a:p>
+            <a:r>
+              <a:rPr lang="de-DE" dirty="0"/>
+              <a:t>Season </a:t>
+            </a:r>
+            <a:r>
+              <a:rPr lang="de-DE" dirty="0" err="1"/>
+              <a:t>distribution</a:t>
+            </a:r>
+            <a:r>
+              <a:rPr lang="de-DE" dirty="0"/>
+              <a:t> </a:t>
+            </a:r>
+            <a:r>
+              <a:rPr lang="de-DE" dirty="0" err="1"/>
+              <a:t>of</a:t>
+            </a:r>
+            <a:r>
+              <a:rPr lang="de-DE" dirty="0"/>
+              <a:t> </a:t>
+            </a:r>
+            <a:r>
+              <a:rPr lang="de-DE" dirty="0" err="1"/>
+              <a:t>accidents</a:t>
+            </a:r>
+            <a:endParaRPr lang="de-DE" dirty="0"/>
+          </a:p>
+        </p:txBody>
+      </p:sp>
+      <p:sp>
+        <p:nvSpPr>
+          <p:cNvPr id="3" name="Inhaltsplatzhalter 2">
+            <a:extLst>
+              <a:ext uri="{FF2B5EF4-FFF2-40B4-BE49-F238E27FC236}">
+                <a16:creationId xmlns:a16="http://schemas.microsoft.com/office/drawing/2014/main" id="{3A24CB8A-15B7-F24D-845A-BA1B53C01A81}"/>
+              </a:ext>
+            </a:extLst>
+          </p:cNvPr>
+          <p:cNvSpPr>
+            <a:spLocks noGrp="1"/>
+          </p:cNvSpPr>
+          <p:nvPr>
+            <p:ph sz="half" idx="1"/>
+          </p:nvPr>
+        </p:nvSpPr>
+        <p:spPr/>
+        <p:txBody>
+          <a:bodyPr/>
+          <a:lstStyle/>
+          <a:p>
+            <a:r>
+              <a:rPr lang="de-DE" dirty="0" err="1"/>
+              <a:t>During</a:t>
+            </a:r>
+            <a:r>
+              <a:rPr lang="de-DE" dirty="0"/>
+              <a:t> </a:t>
+            </a:r>
+            <a:r>
+              <a:rPr lang="de-DE" dirty="0" err="1"/>
+              <a:t>which</a:t>
+            </a:r>
+            <a:r>
+              <a:rPr lang="de-DE" dirty="0"/>
+              <a:t> </a:t>
+            </a:r>
+            <a:r>
+              <a:rPr lang="de-DE" dirty="0" err="1"/>
+              <a:t>season</a:t>
+            </a:r>
+            <a:r>
+              <a:rPr lang="de-DE" dirty="0"/>
+              <a:t> happen </a:t>
+            </a:r>
+            <a:r>
+              <a:rPr lang="de-DE" dirty="0" err="1"/>
+              <a:t>the</a:t>
+            </a:r>
+            <a:r>
+              <a:rPr lang="de-DE" dirty="0"/>
+              <a:t> </a:t>
+            </a:r>
+            <a:r>
+              <a:rPr lang="de-DE" dirty="0" err="1"/>
+              <a:t>most</a:t>
+            </a:r>
+            <a:r>
+              <a:rPr lang="de-DE" dirty="0"/>
+              <a:t> </a:t>
+            </a:r>
+            <a:r>
+              <a:rPr lang="de-DE" dirty="0" err="1"/>
+              <a:t>accidents</a:t>
+            </a:r>
+            <a:r>
+              <a:rPr lang="de-DE" dirty="0"/>
+              <a:t>.</a:t>
+            </a:r>
+          </a:p>
+          <a:p>
+            <a:endParaRPr lang="de-DE" dirty="0"/>
+          </a:p>
+          <a:p>
+            <a:r>
+              <a:rPr lang="de-DE" dirty="0"/>
+              <a:t>Idea: Find </a:t>
+            </a:r>
+            <a:r>
+              <a:rPr lang="de-DE" dirty="0" err="1"/>
+              <a:t>the</a:t>
+            </a:r>
+            <a:r>
+              <a:rPr lang="de-DE" dirty="0"/>
+              <a:t> </a:t>
+            </a:r>
+            <a:r>
+              <a:rPr lang="de-DE" dirty="0" err="1"/>
+              <a:t>motorbike</a:t>
+            </a:r>
+            <a:r>
+              <a:rPr lang="de-DE" dirty="0"/>
+              <a:t> </a:t>
+            </a:r>
+            <a:r>
+              <a:rPr lang="de-DE" dirty="0" err="1"/>
+              <a:t>season</a:t>
+            </a:r>
+            <a:r>
+              <a:rPr lang="de-DE" dirty="0"/>
+              <a:t> and </a:t>
+            </a:r>
+            <a:r>
+              <a:rPr lang="de-DE" dirty="0" err="1"/>
+              <a:t>try</a:t>
+            </a:r>
+            <a:r>
+              <a:rPr lang="de-DE" dirty="0"/>
+              <a:t> </a:t>
+            </a:r>
+            <a:r>
+              <a:rPr lang="de-DE" dirty="0" err="1"/>
+              <a:t>to</a:t>
+            </a:r>
+            <a:r>
+              <a:rPr lang="de-DE" dirty="0"/>
+              <a:t> </a:t>
+            </a:r>
+            <a:r>
+              <a:rPr lang="de-DE" dirty="0" err="1"/>
+              <a:t>erase</a:t>
+            </a:r>
+            <a:r>
+              <a:rPr lang="de-DE" dirty="0"/>
+              <a:t> </a:t>
+            </a:r>
+            <a:r>
+              <a:rPr lang="de-DE" dirty="0" err="1"/>
+              <a:t>those</a:t>
+            </a:r>
+            <a:r>
+              <a:rPr lang="de-DE" dirty="0"/>
+              <a:t> </a:t>
+            </a:r>
+            <a:r>
+              <a:rPr lang="de-DE" dirty="0" err="1"/>
+              <a:t>accidents</a:t>
+            </a:r>
+            <a:r>
+              <a:rPr lang="de-DE" dirty="0"/>
+              <a:t> and </a:t>
+            </a:r>
+            <a:r>
+              <a:rPr lang="de-DE" dirty="0" err="1"/>
+              <a:t>compare</a:t>
+            </a:r>
+            <a:r>
+              <a:rPr lang="de-DE" dirty="0"/>
+              <a:t> </a:t>
+            </a:r>
+            <a:r>
+              <a:rPr lang="de-DE" dirty="0" err="1"/>
+              <a:t>germany</a:t>
+            </a:r>
+            <a:r>
+              <a:rPr lang="de-DE" dirty="0"/>
+              <a:t> </a:t>
+            </a:r>
+            <a:r>
+              <a:rPr lang="de-DE" dirty="0" err="1"/>
+              <a:t>with</a:t>
+            </a:r>
+            <a:r>
+              <a:rPr lang="de-DE" dirty="0"/>
+              <a:t> </a:t>
+            </a:r>
+            <a:r>
+              <a:rPr lang="de-DE" dirty="0" err="1"/>
+              <a:t>uk</a:t>
+            </a:r>
+            <a:endParaRPr lang="de-DE" dirty="0"/>
+          </a:p>
+        </p:txBody>
+      </p:sp>
+      <p:pic>
+        <p:nvPicPr>
+          <p:cNvPr id="7" name="Inhaltsplatzhalter 6">
+            <a:extLst>
+              <a:ext uri="{FF2B5EF4-FFF2-40B4-BE49-F238E27FC236}">
+                <a16:creationId xmlns:a16="http://schemas.microsoft.com/office/drawing/2014/main" id="{6001B002-9DE3-8CF3-FF3E-02C7423EED67}"/>
+              </a:ext>
+            </a:extLst>
+          </p:cNvPr>
+          <p:cNvPicPr>
+            <a:picLocks noGrp="1" noChangeAspect="1"/>
+          </p:cNvPicPr>
+          <p:nvPr>
+            <p:ph sz="half" idx="2"/>
+          </p:nvPr>
+        </p:nvPicPr>
+        <p:blipFill>
+          <a:blip r:embed="rId2"/>
+          <a:stretch>
+            <a:fillRect/>
+          </a:stretch>
+        </p:blipFill>
+        <p:spPr>
+          <a:xfrm>
+            <a:off x="6096000" y="1793649"/>
+            <a:ext cx="5941295" cy="3806361"/>
+          </a:xfrm>
+          <a:prstGeom prst="rect">
+            <a:avLst/>
+          </a:prstGeom>
+        </p:spPr>
+      </p:pic>
+      <p:sp>
+        <p:nvSpPr>
+          <p:cNvPr id="5" name="Foliennummernplatzhalter 4">
+            <a:extLst>
+              <a:ext uri="{FF2B5EF4-FFF2-40B4-BE49-F238E27FC236}">
+                <a16:creationId xmlns:a16="http://schemas.microsoft.com/office/drawing/2014/main" id="{36F71C7C-5B7E-821A-8B0B-985A83F377EF}"/>
+              </a:ext>
+            </a:extLst>
+          </p:cNvPr>
+          <p:cNvSpPr>
+            <a:spLocks noGrp="1"/>
+          </p:cNvSpPr>
+          <p:nvPr>
+            <p:ph type="sldNum" sz="quarter" idx="10"/>
+          </p:nvPr>
+        </p:nvSpPr>
+        <p:spPr/>
+        <p:txBody>
+          <a:bodyPr/>
+          <a:lstStyle/>
+          <a:p>
+            <a:fld id="{109D0305-AB8D-4D9F-955E-175B8BE15BA1}" type="slidenum">
+              <a:rPr lang="en-US" smtClean="0"/>
+              <a:t>8</a:t>
+            </a:fld>
+            <a:endParaRPr lang="en-US"/>
+          </a:p>
+        </p:txBody>
+      </p:sp>
+      <p:sp>
+        <p:nvSpPr>
+          <p:cNvPr id="6" name="Fußzeilenplatzhalter 5">
+            <a:extLst>
+              <a:ext uri="{FF2B5EF4-FFF2-40B4-BE49-F238E27FC236}">
+                <a16:creationId xmlns:a16="http://schemas.microsoft.com/office/drawing/2014/main" id="{441D867A-CFA7-293F-D264-7C2BD6D2E6F0}"/>
+              </a:ext>
+            </a:extLst>
+          </p:cNvPr>
+          <p:cNvSpPr>
+            <a:spLocks noGrp="1"/>
+          </p:cNvSpPr>
+          <p:nvPr>
+            <p:ph type="ftr" sz="quarter" idx="11"/>
+          </p:nvPr>
+        </p:nvSpPr>
+        <p:spPr/>
+        <p:txBody>
+          <a:bodyPr/>
+          <a:lstStyle/>
+          <a:p>
+            <a:r>
+              <a:rPr lang="en-US" sz="1200"/>
+              <a:t>Hands-on AI based 3D Vision - Summer 25</a:t>
+            </a:r>
+            <a:endParaRPr lang="en-US" sz="1200" dirty="0"/>
+          </a:p>
+        </p:txBody>
+      </p:sp>
+    </p:spTree>
+    <p:extLst>
+      <p:ext uri="{BB962C8B-B14F-4D97-AF65-F5344CB8AC3E}">
+        <p14:creationId xmlns:p14="http://schemas.microsoft.com/office/powerpoint/2010/main" val="3123205536"/>
+      </p:ext>
+    </p:extLst>
+  </p:cSld>
+  <p:clrMapOvr>
+    <a:masterClrMapping/>
+  </p:clrMapOvr>
+</p:sld>
+</file>
+
+<file path=ppt/slides/slide9.xml><?xml version="1.0" encoding="utf-8"?>
+<p:sld xmlns:a="http://schemas.openxmlformats.org/drawingml/2006/main" xmlns:r="http://schemas.openxmlformats.org/officeDocument/2006/relationships" xmlns:p="http://schemas.openxmlformats.org/presentationml/2006/main">
+  <p:cSld>
+    <p:spTree>
+      <p:nvGrpSpPr>
+        <p:cNvPr id="1" name=""/>
+        <p:cNvGrpSpPr/>
+        <p:nvPr/>
+      </p:nvGrpSpPr>
+      <p:grpSpPr>
+        <a:xfrm>
+          <a:off x="0" y="0"/>
+          <a:ext cx="0" cy="0"/>
+          <a:chOff x="0" y="0"/>
+          <a:chExt cx="0" cy="0"/>
+        </a:xfrm>
+      </p:grpSpPr>
+      <p:sp>
+        <p:nvSpPr>
+          <p:cNvPr id="2" name="Titel 1">
+            <a:extLst>
+              <a:ext uri="{FF2B5EF4-FFF2-40B4-BE49-F238E27FC236}">
+                <a16:creationId xmlns:a16="http://schemas.microsoft.com/office/drawing/2014/main" id="{A2EA3339-530E-7A83-B73A-84A6E7E58E0D}"/>
+              </a:ext>
+            </a:extLst>
+          </p:cNvPr>
+          <p:cNvSpPr>
+            <a:spLocks noGrp="1"/>
+          </p:cNvSpPr>
+          <p:nvPr>
+            <p:ph type="title"/>
+          </p:nvPr>
+        </p:nvSpPr>
+        <p:spPr/>
+        <p:txBody>
+          <a:bodyPr/>
+          <a:lstStyle/>
+          <a:p>
+            <a:r>
+              <a:rPr lang="de-DE" dirty="0"/>
+              <a:t>Absolute </a:t>
+            </a:r>
+            <a:r>
+              <a:rPr lang="de-DE" dirty="0" err="1"/>
+              <a:t>accident</a:t>
+            </a:r>
+            <a:r>
+              <a:rPr lang="de-DE" dirty="0"/>
+              <a:t> </a:t>
+            </a:r>
+            <a:r>
+              <a:rPr lang="de-DE" dirty="0" err="1"/>
+              <a:t>count</a:t>
+            </a:r>
+            <a:r>
+              <a:rPr lang="de-DE" dirty="0"/>
+              <a:t> per </a:t>
+            </a:r>
+            <a:r>
+              <a:rPr lang="de-DE" dirty="0" err="1"/>
+              <a:t>weekday</a:t>
+            </a:r>
+            <a:r>
+              <a:rPr lang="de-DE" dirty="0"/>
+              <a:t> and </a:t>
+            </a:r>
+            <a:r>
+              <a:rPr lang="de-DE" dirty="0" err="1"/>
+              <a:t>hour</a:t>
+            </a:r>
+            <a:endParaRPr lang="de-DE" dirty="0"/>
+          </a:p>
+        </p:txBody>
+      </p:sp>
+      <p:pic>
+        <p:nvPicPr>
+          <p:cNvPr id="7" name="Inhaltsplatzhalter 6">
+            <a:extLst>
+              <a:ext uri="{FF2B5EF4-FFF2-40B4-BE49-F238E27FC236}">
+                <a16:creationId xmlns:a16="http://schemas.microsoft.com/office/drawing/2014/main" id="{2AC8A311-05E4-6C0A-A536-C0698AE6CCF4}"/>
+              </a:ext>
+            </a:extLst>
+          </p:cNvPr>
+          <p:cNvPicPr>
+            <a:picLocks noGrp="1" noChangeAspect="1"/>
+          </p:cNvPicPr>
+          <p:nvPr>
+            <p:ph sz="half" idx="2"/>
+          </p:nvPr>
+        </p:nvPicPr>
+        <p:blipFill>
+          <a:blip r:embed="rId2"/>
+          <a:stretch>
+            <a:fillRect/>
+          </a:stretch>
+        </p:blipFill>
+        <p:spPr>
+          <a:xfrm>
+            <a:off x="315970" y="1540857"/>
+            <a:ext cx="11560060" cy="3776286"/>
+          </a:xfrm>
+          <a:prstGeom prst="rect">
+            <a:avLst/>
+          </a:prstGeom>
+        </p:spPr>
+      </p:pic>
+      <p:sp>
+        <p:nvSpPr>
+          <p:cNvPr id="5" name="Foliennummernplatzhalter 4">
+            <a:extLst>
+              <a:ext uri="{FF2B5EF4-FFF2-40B4-BE49-F238E27FC236}">
+                <a16:creationId xmlns:a16="http://schemas.microsoft.com/office/drawing/2014/main" id="{5F3DBF1A-DEA9-B971-32AD-DC3870559E65}"/>
+              </a:ext>
+            </a:extLst>
+          </p:cNvPr>
+          <p:cNvSpPr>
+            <a:spLocks noGrp="1"/>
+          </p:cNvSpPr>
+          <p:nvPr>
+            <p:ph type="sldNum" sz="quarter" idx="10"/>
+          </p:nvPr>
+        </p:nvSpPr>
+        <p:spPr/>
+        <p:txBody>
+          <a:bodyPr/>
+          <a:lstStyle/>
+          <a:p>
+            <a:fld id="{109D0305-AB8D-4D9F-955E-175B8BE15BA1}" type="slidenum">
+              <a:rPr lang="en-US" smtClean="0"/>
+              <a:t>9</a:t>
+            </a:fld>
+            <a:endParaRPr lang="en-US"/>
+          </a:p>
+        </p:txBody>
+      </p:sp>
+      <p:sp>
+        <p:nvSpPr>
+          <p:cNvPr id="6" name="Fußzeilenplatzhalter 5">
+            <a:extLst>
+              <a:ext uri="{FF2B5EF4-FFF2-40B4-BE49-F238E27FC236}">
+                <a16:creationId xmlns:a16="http://schemas.microsoft.com/office/drawing/2014/main" id="{3E0B4A51-312F-4A10-F815-B31DD03ADF26}"/>
+              </a:ext>
+            </a:extLst>
+          </p:cNvPr>
+          <p:cNvSpPr>
+            <a:spLocks noGrp="1"/>
+          </p:cNvSpPr>
+          <p:nvPr>
+            <p:ph type="ftr" sz="quarter" idx="11"/>
+          </p:nvPr>
+        </p:nvSpPr>
+        <p:spPr/>
+        <p:txBody>
+          <a:bodyPr/>
+          <a:lstStyle/>
+          <a:p>
+            <a:r>
+              <a:rPr lang="en-US" sz="1200"/>
+              <a:t>Hands-on AI based 3D Vision - Summer 25</a:t>
+            </a:r>
+            <a:endParaRPr lang="en-US" sz="1200" dirty="0"/>
+          </a:p>
+        </p:txBody>
+      </p:sp>
+    </p:spTree>
+    <p:extLst>
+      <p:ext uri="{BB962C8B-B14F-4D97-AF65-F5344CB8AC3E}">
+        <p14:creationId xmlns:p14="http://schemas.microsoft.com/office/powerpoint/2010/main" val="2711366819"/>
       </p:ext>
     </p:extLst>
   </p:cSld>

--- a/midterm_presentation.pptx
+++ b/midterm_presentation.pptx
@@ -4887,7 +4887,13 @@
                       <a:rPr lang="de-DE" sz="1800" b="0" i="0" smtClean="0">
                         <a:latin typeface="Cambria Math" panose="02040503050406030204" pitchFamily="18" charset="0"/>
                       </a:rPr>
-                      <m:t>𝑤𝑖𝑡h</m:t>
+                      <m:t>𝑤𝑖𝑡</m:t>
+                    </m:r>
+                    <m:r>
+                      <a:rPr lang="de-DE" sz="1800" b="0" i="0" smtClean="0">
+                        <a:latin typeface="Cambria Math" panose="02040503050406030204" pitchFamily="18" charset="0"/>
+                      </a:rPr>
+                      <m:t>h</m:t>
                     </m:r>
                     <m:r>
                       <a:rPr lang="de-DE" sz="1800" b="0" i="0" smtClean="0">
@@ -5936,19 +5942,7 @@
                       <a:rPr lang="pt-BR" sz="1600" i="1" dirty="0" smtClean="0">
                         <a:latin typeface="Cambria Math" panose="02040503050406030204" pitchFamily="18" charset="0"/>
                       </a:rPr>
-                      <m:t>)</m:t>
-                    </m:r>
-                    <m:r>
-                      <a:rPr lang="pt-BR" sz="1600" i="1" dirty="0" smtClean="0">
-                        <a:latin typeface="Cambria Math" panose="02040503050406030204" pitchFamily="18" charset="0"/>
-                      </a:rPr>
-                      <m:t>​</m:t>
-                    </m:r>
-                    <m:r>
-                      <a:rPr lang="pt-BR" sz="1600" i="1" dirty="0" smtClean="0">
-                        <a:latin typeface="Cambria Math" panose="02040503050406030204" pitchFamily="18" charset="0"/>
-                      </a:rPr>
-                      <m:t>=</m:t>
+                      <m:t>)​=</m:t>
                     </m:r>
                     <m:r>
                       <m:rPr>
@@ -6011,13 +6005,7 @@
                       <a:rPr lang="pt-BR" sz="1600" i="1" dirty="0" smtClean="0">
                         <a:latin typeface="Cambria Math" panose="02040503050406030204" pitchFamily="18" charset="0"/>
                       </a:rPr>
-                      <m:t>​</m:t>
-                    </m:r>
-                    <m:r>
-                      <a:rPr lang="pt-BR" sz="1600" i="1" dirty="0" smtClean="0">
-                        <a:latin typeface="Cambria Math" panose="02040503050406030204" pitchFamily="18" charset="0"/>
-                      </a:rPr>
-                      <m:t>+</m:t>
+                      <m:t>​+</m:t>
                     </m:r>
                     <m:sSub>
                       <m:sSubPr>
@@ -6108,19 +6096,7 @@
                       <a:rPr lang="pt-BR" sz="1600" i="1" dirty="0" smtClean="0">
                         <a:latin typeface="Cambria Math" panose="02040503050406030204" pitchFamily="18" charset="0"/>
                       </a:rPr>
-                      <m:t>)</m:t>
-                    </m:r>
-                    <m:r>
-                      <a:rPr lang="pt-BR" sz="1600" i="1" dirty="0" smtClean="0">
-                        <a:latin typeface="Cambria Math" panose="02040503050406030204" pitchFamily="18" charset="0"/>
-                      </a:rPr>
-                      <m:t>​</m:t>
-                    </m:r>
-                    <m:r>
-                      <a:rPr lang="pt-BR" sz="1600" i="1" dirty="0" smtClean="0">
-                        <a:latin typeface="Cambria Math" panose="02040503050406030204" pitchFamily="18" charset="0"/>
-                      </a:rPr>
-                      <m:t>)</m:t>
+                      <m:t>)​)</m:t>
                     </m:r>
                   </m:oMath>
                 </a14:m>
@@ -6660,8 +6636,8 @@
         </p:nvSpPr>
         <p:spPr>
           <a:xfrm>
-            <a:off x="958851" y="1079947"/>
-            <a:ext cx="5035549" cy="5233766"/>
+            <a:off x="958852" y="1898126"/>
+            <a:ext cx="5035549" cy="3061747"/>
           </a:xfrm>
         </p:spPr>
         <p:txBody>
@@ -6669,25 +6645,25 @@
           <a:lstStyle/>
           <a:p>
             <a:r>
-              <a:rPr lang="en-US" dirty="0"/>
+              <a:rPr lang="en-US" sz="1800" dirty="0"/>
               <a:t>Shows percentage of all accidents happening on a specific time.</a:t>
             </a:r>
           </a:p>
           <a:p>
-            <a:endParaRPr lang="en-US" dirty="0"/>
-          </a:p>
-          <a:p>
-            <a:r>
-              <a:rPr lang="en-US" dirty="0"/>
+            <a:endParaRPr lang="en-US" sz="1800" dirty="0"/>
+          </a:p>
+          <a:p>
+            <a:r>
+              <a:rPr lang="en-US" sz="1800" dirty="0"/>
               <a:t>One plot for only weekdays. It can be extended to months, or weekend days…</a:t>
             </a:r>
           </a:p>
           <a:p>
-            <a:endParaRPr lang="en-US" dirty="0"/>
-          </a:p>
-          <a:p>
-            <a:r>
-              <a:rPr lang="en-US" dirty="0"/>
+            <a:endParaRPr lang="en-US" sz="1800" dirty="0"/>
+          </a:p>
+          <a:p>
+            <a:r>
+              <a:rPr lang="en-US" sz="1800" dirty="0"/>
               <a:t>Idea: Find specific motorbike time slots and compare the output after erasing some motorbike peaks</a:t>
             </a:r>
           </a:p>
@@ -6709,16 +6685,17 @@
             <p:ph sz="half" idx="2"/>
           </p:nvPr>
         </p:nvPicPr>
-        <p:blipFill>
+        <p:blipFill rotWithShape="1">
           <a:blip r:embed="rId2"/>
+          <a:srcRect l="734" t="1889" r="1729" b="3182"/>
           <a:stretch>
             <a:fillRect/>
           </a:stretch>
         </p:blipFill>
         <p:spPr>
           <a:xfrm>
-            <a:off x="6203169" y="1079946"/>
-            <a:ext cx="5024414" cy="5233767"/>
+            <a:off x="6240066" y="1178720"/>
+            <a:ext cx="4900612" cy="4968478"/>
           </a:xfrm>
           <a:prstGeom prst="rect">
             <a:avLst/>
@@ -6903,11 +6880,21 @@
             <p:ph sz="half" idx="1"/>
           </p:nvPr>
         </p:nvSpPr>
-        <p:spPr/>
+        <p:spPr>
+          <a:xfrm>
+            <a:off x="849991" y="1157050"/>
+            <a:ext cx="10274181" cy="2115316"/>
+          </a:xfrm>
+        </p:spPr>
         <p:txBody>
           <a:bodyPr/>
           <a:lstStyle/>
           <a:p>
+            <a:pPr>
+              <a:lnSpc>
+                <a:spcPct val="150000"/>
+              </a:lnSpc>
+            </a:pPr>
             <a:r>
               <a:rPr lang="de-DE" dirty="0" err="1"/>
               <a:t>During</a:t>
@@ -6958,16 +6945,18 @@
             </a:r>
           </a:p>
           <a:p>
-            <a:endParaRPr lang="de-DE" dirty="0"/>
-          </a:p>
-          <a:p>
+            <a:pPr>
+              <a:lnSpc>
+                <a:spcPct val="150000"/>
+              </a:lnSpc>
+            </a:pPr>
             <a:r>
               <a:rPr lang="de-DE" dirty="0"/>
               <a:t>Idea: Find </a:t>
             </a:r>
             <a:r>
               <a:rPr lang="de-DE" dirty="0" err="1"/>
-              <a:t>the</a:t>
+              <a:t>motorbike</a:t>
             </a:r>
             <a:r>
               <a:rPr lang="de-DE" dirty="0"/>
@@ -6975,7 +6964,15 @@
             </a:r>
             <a:r>
               <a:rPr lang="de-DE" dirty="0" err="1"/>
-              <a:t>motorbike</a:t>
+              <a:t>season</a:t>
+            </a:r>
+            <a:r>
+              <a:rPr lang="de-DE" dirty="0"/>
+              <a:t> and </a:t>
+            </a:r>
+            <a:r>
+              <a:rPr lang="de-DE" dirty="0" err="1"/>
+              <a:t>try</a:t>
             </a:r>
             <a:r>
               <a:rPr lang="de-DE" dirty="0"/>
@@ -6983,15 +6980,7 @@
             </a:r>
             <a:r>
               <a:rPr lang="de-DE" dirty="0" err="1"/>
-              <a:t>season</a:t>
-            </a:r>
-            <a:r>
-              <a:rPr lang="de-DE" dirty="0"/>
-              <a:t> and </a:t>
-            </a:r>
-            <a:r>
-              <a:rPr lang="de-DE" dirty="0" err="1"/>
-              <a:t>try</a:t>
+              <a:t>to</a:t>
             </a:r>
             <a:r>
               <a:rPr lang="de-DE" dirty="0"/>
@@ -6999,23 +6988,7 @@
             </a:r>
             <a:r>
               <a:rPr lang="de-DE" dirty="0" err="1"/>
-              <a:t>to</a:t>
-            </a:r>
-            <a:r>
-              <a:rPr lang="de-DE" dirty="0"/>
-              <a:t> </a:t>
-            </a:r>
-            <a:r>
-              <a:rPr lang="de-DE" dirty="0" err="1"/>
               <a:t>erase</a:t>
-            </a:r>
-            <a:r>
-              <a:rPr lang="de-DE" dirty="0"/>
-              <a:t> </a:t>
-            </a:r>
-            <a:r>
-              <a:rPr lang="de-DE" dirty="0" err="1"/>
-              <a:t>those</a:t>
             </a:r>
             <a:r>
               <a:rPr lang="de-DE" dirty="0"/>
@@ -7077,16 +7050,17 @@
             <p:ph sz="half" idx="2"/>
           </p:nvPr>
         </p:nvPicPr>
-        <p:blipFill>
+        <p:blipFill rotWithShape="1">
           <a:blip r:embed="rId2"/>
+          <a:srcRect r="697"/>
           <a:stretch>
             <a:fillRect/>
           </a:stretch>
         </p:blipFill>
         <p:spPr>
           <a:xfrm>
-            <a:off x="6096000" y="1793649"/>
-            <a:ext cx="5941295" cy="3806361"/>
+            <a:off x="2982649" y="2020032"/>
+            <a:ext cx="6226701" cy="4017195"/>
           </a:xfrm>
           <a:prstGeom prst="rect">
             <a:avLst/>
@@ -7262,8 +7236,8 @@
         </p:blipFill>
         <p:spPr>
           <a:xfrm>
-            <a:off x="315970" y="1540857"/>
-            <a:ext cx="11560060" cy="3776286"/>
+            <a:off x="678476" y="1726058"/>
+            <a:ext cx="10630611" cy="3472666"/>
           </a:xfrm>
           <a:prstGeom prst="rect">
             <a:avLst/>
